--- a/lab7/Лаба 2.pptx
+++ b/lab7/Лаба 2.pptx
@@ -17924,8 +17924,12 @@
               <a:t>Для построения диаграммы был выбран веб-редактор </a:t>
             </a:r>
             <a:r>
+              <a:rPr lang="en-US" sz="2000" b="1" dirty="0"/>
+              <a:t>Draw</a:t>
+            </a:r>
+            <a:r>
               <a:rPr lang="ru-RU" sz="2000" b="1" dirty="0"/>
-              <a:t>bpmn.io</a:t>
+              <a:t>.io</a:t>
             </a:r>
             <a:r>
               <a:rPr lang="ru-RU" sz="2000" dirty="0"/>
@@ -19851,14 +19855,14 @@
                         <a:buNone/>
                       </a:pPr>
                       <a:r>
-                        <a:rPr lang="ru-RU" sz="1600" kern="0">
+                        <a:rPr lang="ru-RU" sz="1600" kern="0" dirty="0" err="1">
                           <a:effectLst/>
                           <a:latin typeface="Times New Roman" panose="02020603050405020304" pitchFamily="18" charset="0"/>
                           <a:cs typeface="Times New Roman" panose="02020603050405020304" pitchFamily="18" charset="0"/>
                         </a:rPr>
                         <a:t>Organizations</a:t>
                       </a:r>
-                      <a:endParaRPr lang="ru-RU" sz="1600" kern="100">
+                      <a:endParaRPr lang="ru-RU" sz="1600" kern="100" dirty="0">
                         <a:effectLst/>
                         <a:latin typeface="Times New Roman" panose="02020603050405020304" pitchFamily="18" charset="0"/>
                         <a:ea typeface="Calibri" panose="020F0502020204030204" pitchFamily="34" charset="0"/>
@@ -20226,14 +20230,14 @@
                         <a:buNone/>
                       </a:pPr>
                       <a:r>
-                        <a:rPr lang="ru-RU" sz="1600" kern="0">
+                        <a:rPr lang="ru-RU" sz="1600" kern="0" dirty="0">
                           <a:effectLst/>
                           <a:latin typeface="Times New Roman" panose="02020603050405020304" pitchFamily="18" charset="0"/>
                           <a:cs typeface="Times New Roman" panose="02020603050405020304" pitchFamily="18" charset="0"/>
                         </a:rPr>
                         <a:t>VARCHAR(9)</a:t>
                       </a:r>
-                      <a:endParaRPr lang="ru-RU" sz="1600" kern="100">
+                      <a:endParaRPr lang="ru-RU" sz="1600" kern="100" dirty="0">
                         <a:effectLst/>
                         <a:latin typeface="Times New Roman" panose="02020603050405020304" pitchFamily="18" charset="0"/>
                         <a:ea typeface="Calibri" panose="020F0502020204030204" pitchFamily="34" charset="0"/>
@@ -20558,7 +20562,7 @@
                         </a:lnSpc>
                         <a:buNone/>
                       </a:pPr>
-                      <a:endParaRPr lang="ru-RU" sz="1600" kern="100">
+                      <a:endParaRPr lang="ru-RU" sz="1600" kern="100" dirty="0">
                         <a:effectLst/>
                         <a:latin typeface="Times New Roman" panose="02020603050405020304" pitchFamily="18" charset="0"/>
                         <a:cs typeface="Times New Roman" panose="02020603050405020304" pitchFamily="18" charset="0"/>
@@ -20578,7 +20582,7 @@
                         </a:lnSpc>
                         <a:buNone/>
                       </a:pPr>
-                      <a:endParaRPr lang="ru-RU" sz="1600" kern="100">
+                      <a:endParaRPr lang="ru-RU" sz="1600" kern="100" dirty="0">
                         <a:effectLst/>
                         <a:latin typeface="Times New Roman" panose="02020603050405020304" pitchFamily="18" charset="0"/>
                         <a:cs typeface="Times New Roman" panose="02020603050405020304" pitchFamily="18" charset="0"/>
@@ -20593,14 +20597,14 @@
                     <a:lstStyle/>
                     <a:p>
                       <a:r>
-                        <a:rPr lang="ru-RU" sz="1600" kern="0">
+                        <a:rPr lang="ru-RU" sz="1600" kern="0" dirty="0">
                           <a:effectLst/>
                           <a:latin typeface="Times New Roman" panose="02020603050405020304" pitchFamily="18" charset="0"/>
                           <a:cs typeface="Times New Roman" panose="02020603050405020304" pitchFamily="18" charset="0"/>
                         </a:rPr>
                         <a:t>Регистрационный номер в СФР</a:t>
                       </a:r>
-                      <a:endParaRPr lang="ru-RU" sz="1600">
+                      <a:endParaRPr lang="ru-RU" sz="1600" dirty="0">
                         <a:latin typeface="Times New Roman" panose="02020603050405020304" pitchFamily="18" charset="0"/>
                         <a:cs typeface="Times New Roman" panose="02020603050405020304" pitchFamily="18" charset="0"/>
                       </a:endParaRPr>
@@ -20768,7 +20772,7 @@
                     <a:bodyPr/>
                     <a:lstStyle/>
                     <a:p>
-                      <a:endParaRPr lang="ru-RU" sz="1600">
+                      <a:endParaRPr lang="ru-RU" sz="1600" dirty="0">
                         <a:latin typeface="Times New Roman" panose="02020603050405020304" pitchFamily="18" charset="0"/>
                         <a:cs typeface="Times New Roman" panose="02020603050405020304" pitchFamily="18" charset="0"/>
                       </a:endParaRPr>
@@ -20925,14 +20929,14 @@
                     <a:lstStyle/>
                     <a:p>
                       <a:r>
-                        <a:rPr lang="ru-RU" sz="1600" kern="0">
+                        <a:rPr lang="ru-RU" sz="1600" kern="0" dirty="0">
                           <a:effectLst/>
                           <a:latin typeface="Times New Roman" panose="02020603050405020304" pitchFamily="18" charset="0"/>
                           <a:cs typeface="Times New Roman" panose="02020603050405020304" pitchFamily="18" charset="0"/>
                         </a:rPr>
                         <a:t>Наименование банка</a:t>
                       </a:r>
-                      <a:endParaRPr lang="ru-RU" sz="1600">
+                      <a:endParaRPr lang="ru-RU" sz="1600" dirty="0">
                         <a:latin typeface="Times New Roman" panose="02020603050405020304" pitchFamily="18" charset="0"/>
                         <a:cs typeface="Times New Roman" panose="02020603050405020304" pitchFamily="18" charset="0"/>
                       </a:endParaRPr>
@@ -21077,14 +21081,14 @@
                     <a:lstStyle/>
                     <a:p>
                       <a:r>
-                        <a:rPr lang="ru-RU" sz="1600" kern="0">
+                        <a:rPr lang="ru-RU" sz="1600" kern="0" dirty="0">
                           <a:effectLst/>
                           <a:latin typeface="Times New Roman" panose="02020603050405020304" pitchFamily="18" charset="0"/>
                           <a:cs typeface="Times New Roman" panose="02020603050405020304" pitchFamily="18" charset="0"/>
                         </a:rPr>
                         <a:t>Корреспондентский счет</a:t>
                       </a:r>
-                      <a:endParaRPr lang="ru-RU" sz="1600">
+                      <a:endParaRPr lang="ru-RU" sz="1600" dirty="0">
                         <a:latin typeface="Times New Roman" panose="02020603050405020304" pitchFamily="18" charset="0"/>
                         <a:cs typeface="Times New Roman" panose="02020603050405020304" pitchFamily="18" charset="0"/>
                       </a:endParaRPr>
@@ -21103,7 +21107,7 @@
                         </a:lnSpc>
                         <a:buNone/>
                       </a:pPr>
-                      <a:endParaRPr lang="ru-RU" sz="1600" kern="100">
+                      <a:endParaRPr lang="ru-RU" sz="1600" kern="100" dirty="0">
                         <a:effectLst/>
                         <a:latin typeface="Times New Roman" panose="02020603050405020304" pitchFamily="18" charset="0"/>
                         <a:cs typeface="Times New Roman" panose="02020603050405020304" pitchFamily="18" charset="0"/>
@@ -21275,14 +21279,14 @@
                         <a:buNone/>
                       </a:pPr>
                       <a:r>
-                        <a:rPr lang="ru-RU" sz="1600" kern="0">
+                        <a:rPr lang="ru-RU" sz="1600" kern="0" dirty="0">
                           <a:effectLst/>
                           <a:latin typeface="Times New Roman" panose="02020603050405020304" pitchFamily="18" charset="0"/>
                           <a:cs typeface="Times New Roman" panose="02020603050405020304" pitchFamily="18" charset="0"/>
                         </a:rPr>
                         <a:t>Код бюджетной классификации</a:t>
                       </a:r>
-                      <a:endParaRPr lang="ru-RU" sz="1600" kern="100">
+                      <a:endParaRPr lang="ru-RU" sz="1600" kern="100" dirty="0">
                         <a:effectLst/>
                         <a:latin typeface="Times New Roman" panose="02020603050405020304" pitchFamily="18" charset="0"/>
                         <a:ea typeface="Calibri" panose="020F0502020204030204" pitchFamily="34" charset="0"/>
@@ -27312,7 +27316,7 @@
                         <a:buNone/>
                       </a:pPr>
                       <a:r>
-                        <a:rPr lang="ru-RU" sz="1200" b="0">
+                        <a:rPr lang="ru-RU" sz="1200" b="0" dirty="0">
                           <a:effectLst/>
                           <a:latin typeface="Times New Roman" panose="02020603050405020304" pitchFamily="18" charset="0"/>
                           <a:cs typeface="Times New Roman" panose="02020603050405020304" pitchFamily="18" charset="0"/>
@@ -27652,7 +27656,7 @@
                         <a:buNone/>
                       </a:pPr>
                       <a:r>
-                        <a:rPr lang="ru-RU" sz="1200" b="0">
+                        <a:rPr lang="ru-RU" sz="1200" b="0" dirty="0">
                           <a:effectLst/>
                           <a:latin typeface="Times New Roman" panose="02020603050405020304" pitchFamily="18" charset="0"/>
                           <a:cs typeface="Times New Roman" panose="02020603050405020304" pitchFamily="18" charset="0"/>
@@ -27951,7 +27955,7 @@
                         <a:buNone/>
                       </a:pPr>
                       <a:r>
-                        <a:rPr lang="ru-RU" sz="1200" b="0">
+                        <a:rPr lang="ru-RU" sz="1200" b="0" dirty="0">
                           <a:effectLst/>
                           <a:latin typeface="Times New Roman" panose="02020603050405020304" pitchFamily="18" charset="0"/>
                           <a:cs typeface="Times New Roman" panose="02020603050405020304" pitchFamily="18" charset="0"/>
@@ -27992,7 +27996,7 @@
                         <a:buNone/>
                       </a:pPr>
                       <a:r>
-                        <a:rPr lang="ru-RU" sz="1200" b="0">
+                        <a:rPr lang="ru-RU" sz="1200" b="0" dirty="0">
                           <a:effectLst/>
                           <a:latin typeface="Times New Roman" panose="02020603050405020304" pitchFamily="18" charset="0"/>
                           <a:cs typeface="Times New Roman" panose="02020603050405020304" pitchFamily="18" charset="0"/>
@@ -28286,7 +28290,7 @@
                         <a:buNone/>
                       </a:pPr>
                       <a:r>
-                        <a:rPr lang="ru-RU" sz="1200" b="0">
+                        <a:rPr lang="ru-RU" sz="1200" b="0" dirty="0">
                           <a:effectLst/>
                           <a:latin typeface="Times New Roman" panose="02020603050405020304" pitchFamily="18" charset="0"/>
                           <a:cs typeface="Times New Roman" panose="02020603050405020304" pitchFamily="18" charset="0"/>
@@ -28327,13 +28331,18 @@
                         <a:buNone/>
                       </a:pPr>
                       <a:r>
-                        <a:rPr lang="en-US" sz="1200" b="0">
+                        <a:rPr lang="en-US" sz="1200" b="0" dirty="0" err="1">
                           <a:effectLst/>
                           <a:latin typeface="Times New Roman" panose="02020603050405020304" pitchFamily="18" charset="0"/>
                           <a:cs typeface="Times New Roman" panose="02020603050405020304" pitchFamily="18" charset="0"/>
                         </a:rPr>
                         <a:t>PayerINN</a:t>
                       </a:r>
+                      <a:endParaRPr lang="en-US" sz="1200" b="0" dirty="0">
+                        <a:effectLst/>
+                        <a:latin typeface="Times New Roman" panose="02020603050405020304" pitchFamily="18" charset="0"/>
+                        <a:cs typeface="Times New Roman" panose="02020603050405020304" pitchFamily="18" charset="0"/>
+                      </a:endParaRPr>
                     </a:p>
                   </a:txBody>
                   <a:tcPr marL="22860" marR="22860" marT="15240" marB="15240" anchor="ctr">
@@ -28621,13 +28630,18 @@
                         <a:buNone/>
                       </a:pPr>
                       <a:r>
-                        <a:rPr lang="en-US" sz="1200" b="0">
+                        <a:rPr lang="en-US" sz="1200" b="0" dirty="0" err="1">
                           <a:effectLst/>
                           <a:latin typeface="Times New Roman" panose="02020603050405020304" pitchFamily="18" charset="0"/>
                           <a:cs typeface="Times New Roman" panose="02020603050405020304" pitchFamily="18" charset="0"/>
                         </a:rPr>
                         <a:t>PayerKPP</a:t>
                       </a:r>
+                      <a:endParaRPr lang="en-US" sz="1200" b="0" dirty="0">
+                        <a:effectLst/>
+                        <a:latin typeface="Times New Roman" panose="02020603050405020304" pitchFamily="18" charset="0"/>
+                        <a:cs typeface="Times New Roman" panose="02020603050405020304" pitchFamily="18" charset="0"/>
+                      </a:endParaRPr>
                     </a:p>
                   </a:txBody>
                   <a:tcPr marL="22860" marR="22860" marT="15240" marB="15240" anchor="ctr">
@@ -28915,13 +28929,18 @@
                         <a:buNone/>
                       </a:pPr>
                       <a:r>
-                        <a:rPr lang="en-US" sz="1200" b="0">
+                        <a:rPr lang="en-US" sz="1200" b="0" dirty="0" err="1">
                           <a:effectLst/>
                           <a:latin typeface="Times New Roman" panose="02020603050405020304" pitchFamily="18" charset="0"/>
                           <a:cs typeface="Times New Roman" panose="02020603050405020304" pitchFamily="18" charset="0"/>
                         </a:rPr>
                         <a:t>PayerName</a:t>
                       </a:r>
+                      <a:endParaRPr lang="en-US" sz="1200" b="0" dirty="0">
+                        <a:effectLst/>
+                        <a:latin typeface="Times New Roman" panose="02020603050405020304" pitchFamily="18" charset="0"/>
+                        <a:cs typeface="Times New Roman" panose="02020603050405020304" pitchFamily="18" charset="0"/>
+                      </a:endParaRPr>
                     </a:p>
                   </a:txBody>
                   <a:tcPr marL="22860" marR="22860" marT="15240" marB="15240" anchor="ctr">
@@ -28956,7 +28975,7 @@
                         <a:buNone/>
                       </a:pPr>
                       <a:r>
-                        <a:rPr lang="ru-RU" sz="1200" b="0">
+                        <a:rPr lang="ru-RU" sz="1200" b="0" dirty="0">
                           <a:effectLst/>
                           <a:latin typeface="Times New Roman" panose="02020603050405020304" pitchFamily="18" charset="0"/>
                           <a:cs typeface="Times New Roman" panose="02020603050405020304" pitchFamily="18" charset="0"/>
